--- a/presentations/PR_L07_StockShelves_Lesson.pptx
+++ b/presentations/PR_L07_StockShelves_Lesson.pptx
@@ -2617,7 +2617,7 @@
                 <a:ea typeface="IBM Plex Sans" pitchFamily="34" charset="-122"/>
                 <a:cs typeface="IBM Plex Sans" pitchFamily="34" charset="-120"/>
               </a:rPr>
-              <a:t>Mistake: finding the best value but forgetting to record the position it was found at.</a:t>
+              <a:t>Common mistake: finding the best value but forgetting to record the position it was found at.</a:t>
             </a:r>
             <a:endParaRPr lang="en-US" sz="1700" dirty="0"/>
           </a:p>
@@ -7905,7 +7905,7 @@
                 <a:ea typeface="IBM Plex Sans" pitchFamily="34" charset="-122"/>
                 <a:cs typeface="IBM Plex Sans" pitchFamily="34" charset="-120"/>
               </a:rPr>
-              <a:t>Mistake: creating the empty list inside the loop, which throws each item away again.</a:t>
+              <a:t>Common mistake: creating the empty list inside the loop, which throws each item away again.</a:t>
             </a:r>
             <a:endParaRPr lang="en-US" sz="1700" dirty="0"/>
           </a:p>
@@ -8481,7 +8481,7 @@
                 <a:ea typeface="IBM Plex Sans" pitchFamily="34" charset="-122"/>
                 <a:cs typeface="IBM Plex Sans" pitchFamily="34" charset="-120"/>
               </a:rPr>
-              <a:t>Mistake: an index past the end, which stops the program with an error.</a:t>
+              <a:t>Common mistake: an index past the end, which stops the program with an error.</a:t>
             </a:r>
             <a:endParaRPr lang="en-US" sz="1700" dirty="0"/>
           </a:p>
@@ -9057,7 +9057,7 @@
                 <a:ea typeface="IBM Plex Sans" pitchFamily="34" charset="-122"/>
                 <a:cs typeface="IBM Plex Sans" pitchFamily="34" charset="-120"/>
               </a:rPr>
-              <a:t>Mistake: printing the index when the task asked for the value, or the other way round.</a:t>
+              <a:t>Common mistake: printing the index when the task asked for the value, or the other way round.</a:t>
             </a:r>
             <a:endParaRPr lang="en-US" sz="1700" dirty="0"/>
           </a:p>
@@ -9633,7 +9633,7 @@
                 <a:ea typeface="IBM Plex Sans" pitchFamily="34" charset="-122"/>
                 <a:cs typeface="IBM Plex Sans" pitchFamily="34" charset="-120"/>
               </a:rPr>
-              <a:t>Mistake: removing items while looping over the same list, which makes the loop skip some.</a:t>
+              <a:t>Common mistake: removing items while looping over the same list, which makes the loop skip some.</a:t>
             </a:r>
             <a:endParaRPr lang="en-US" sz="1700" dirty="0"/>
           </a:p>
@@ -10209,7 +10209,7 @@
                 <a:ea typeface="IBM Plex Sans" pitchFamily="34" charset="-122"/>
                 <a:cs typeface="IBM Plex Sans" pitchFamily="34" charset="-120"/>
               </a:rPr>
-              <a:t>Mistake: starting the highest at 0, which fails on a list of negative numbers.</a:t>
+              <a:t>Common mistake: starting the highest at 0, which fails on a list of negative numbers.</a:t>
             </a:r>
             <a:endParaRPr lang="en-US" sz="1700" dirty="0"/>
           </a:p>
